--- a/presentations/09-c-first-contact/09-c-first-contact-lecture.pptx
+++ b/presentations/09-c-first-contact/09-c-first-contact-lecture.pptx
@@ -139,7 +139,7 @@
   <p:extLst>
     <p:ext uri="{521415D9-36F7-43E2-AB2F-B90AF26B5E84}">
       <p14:sectionLst xmlns:p14="http://schemas.microsoft.com/office/powerpoint/2010/main">
-        <p14:section name="Opening" id="{88d81955-6f65-8bf8-d698-e62b6566debc}">
+        <p14:section name="Opening" id="{ff980634-2f2d-ed4d-34ab-46cd0c271f8b}">
           <p14:sldIdLst>
             <p14:sldId id="256"/>
             <p14:sldId id="257"/>
@@ -152,7 +152,7 @@
             <p14:sldId id="264"/>
           </p14:sldIdLst>
         </p14:section>
-        <p14:section name="State" id="{3aec683d-f89b-8e5e-fc1b-79e923a57cba}">
+        <p14:section name="State" id="{32a6b20d-7577-30de-7486-2475cd06ce8a}">
           <p14:sldIdLst>
             <p14:sldId id="265"/>
             <p14:sldId id="266"/>
@@ -163,7 +163,7 @@
             <p14:sldId id="271"/>
           </p14:sldIdLst>
         </p14:section>
-        <p14:section name="Input" id="{c5e8bf1e-5391-521c-3420-437b545f5891}">
+        <p14:section name="Input" id="{60bd8ea3-c4fc-f011-55e2-6af6b3d4081a}">
           <p14:sldIdLst>
             <p14:sldId id="272"/>
             <p14:sldId id="273"/>
@@ -173,7 +173,7 @@
             <p14:sldId id="277"/>
           </p14:sldIdLst>
         </p14:section>
-        <p14:section name="The ball and the collision" id="{8724d5be-f308-2ec8-ddad-1a9ddc6b681e}">
+        <p14:section name="The ball and the collision" id="{cd7f33e4-abec-3f97-4569-7d747f17f4e2}">
           <p14:sldIdLst>
             <p14:sldId id="278"/>
             <p14:sldId id="279"/>
@@ -182,7 +182,7 @@
             <p14:sldId id="282"/>
           </p14:sldIdLst>
         </p14:section>
-        <p14:section name="Drawing" id="{66932888-54ec-7db2-d6d1-767dd4b31d59}">
+        <p14:section name="Drawing" id="{721f8b88-9328-839e-244a-c50f4bb25e5e}">
           <p14:sldIdLst>
             <p14:sldId id="283"/>
             <p14:sldId id="284"/>
@@ -191,7 +191,7 @@
             <p14:sldId id="287"/>
           </p14:sldIdLst>
         </p14:section>
-        <p14:section name="Closing" id="{2e49ec5b-8f7f-39a5-d8c9-0f74ce65b894}">
+        <p14:section name="Closing" id="{d0c272c2-bf22-6a6b-1ab8-5d3519d2b51d}">
           <p14:sldIdLst>
             <p14:sldId id="288"/>
           </p14:sldIdLst>
@@ -10051,7 +10051,7 @@
               <a:buNone/>
             </a:pPr>
             <a:r>
-              <a:rPr lang="en-US" sz="1150" dirty="0">
+              <a:rPr lang="en-US" sz="1350" dirty="0">
                 <a:solidFill>
                   <a:srgbClr val="E6EDF2"/>
                 </a:solidFill>
@@ -10061,14 +10061,14 @@
               </a:rPr>
               <a:t>void pong_c_update(void) {</a:t>
             </a:r>
-            <a:endParaRPr lang="en-US" sz="1150" dirty="0"/>
+            <a:endParaRPr lang="en-US" sz="1350" dirty="0"/>
           </a:p>
           <a:p>
             <a:pPr indent="0" marL="0">
               <a:buNone/>
             </a:pPr>
             <a:r>
-              <a:rPr lang="en-US" sz="1150" dirty="0">
+              <a:rPr lang="en-US" sz="1350" dirty="0">
                 <a:solidFill>
                   <a:srgbClr val="E6EDF2"/>
                 </a:solidFill>
@@ -10078,14 +10078,14 @@
               </a:rPr>
               <a:t>    uint32_t input = prg32_input_read();</a:t>
             </a:r>
-            <a:endParaRPr lang="en-US" sz="1150" dirty="0"/>
+            <a:endParaRPr lang="en-US" sz="1350" dirty="0"/>
           </a:p>
           <a:p>
             <a:pPr indent="0" marL="0">
               <a:buNone/>
             </a:pPr>
             <a:r>
-              <a:rPr lang="en-US" sz="1150" dirty="0">
+              <a:rPr lang="en-US" sz="1350" dirty="0">
                 <a:solidFill>
                   <a:srgbClr val="E6EDF2"/>
                 </a:solidFill>
@@ -10095,14 +10095,14 @@
               </a:rPr>
               <a:t>    if (input &amp; PRG32_BTN_LEFT) {</a:t>
             </a:r>
-            <a:endParaRPr lang="en-US" sz="1150" dirty="0"/>
+            <a:endParaRPr lang="en-US" sz="1350" dirty="0"/>
           </a:p>
           <a:p>
             <a:pPr indent="0" marL="0">
               <a:buNone/>
             </a:pPr>
             <a:r>
-              <a:rPr lang="en-US" sz="1150" dirty="0">
+              <a:rPr lang="en-US" sz="1350" dirty="0">
                 <a:solidFill>
                   <a:srgbClr val="E6EDF2"/>
                 </a:solidFill>
@@ -10112,14 +10112,14 @@
               </a:rPr>
               <a:t>        paddle_x -= 3;</a:t>
             </a:r>
-            <a:endParaRPr lang="en-US" sz="1150" dirty="0"/>
+            <a:endParaRPr lang="en-US" sz="1350" dirty="0"/>
           </a:p>
           <a:p>
             <a:pPr indent="0" marL="0">
               <a:buNone/>
             </a:pPr>
             <a:r>
-              <a:rPr lang="en-US" sz="1150" dirty="0">
+              <a:rPr lang="en-US" sz="1350" dirty="0">
                 <a:solidFill>
                   <a:srgbClr val="E6EDF2"/>
                 </a:solidFill>
@@ -10129,14 +10129,14 @@
               </a:rPr>
               <a:t>    }</a:t>
             </a:r>
-            <a:endParaRPr lang="en-US" sz="1150" dirty="0"/>
+            <a:endParaRPr lang="en-US" sz="1350" dirty="0"/>
           </a:p>
           <a:p>
             <a:pPr indent="0" marL="0">
               <a:buNone/>
             </a:pPr>
             <a:r>
-              <a:rPr lang="en-US" sz="1150" dirty="0">
+              <a:rPr lang="en-US" sz="1350" dirty="0">
                 <a:solidFill>
                   <a:srgbClr val="E6EDF2"/>
                 </a:solidFill>
@@ -10146,14 +10146,14 @@
               </a:rPr>
               <a:t>    if (input &amp; PRG32_BTN_RIGHT) {</a:t>
             </a:r>
-            <a:endParaRPr lang="en-US" sz="1150" dirty="0"/>
+            <a:endParaRPr lang="en-US" sz="1350" dirty="0"/>
           </a:p>
           <a:p>
             <a:pPr indent="0" marL="0">
               <a:buNone/>
             </a:pPr>
             <a:r>
-              <a:rPr lang="en-US" sz="1150" dirty="0">
+              <a:rPr lang="en-US" sz="1350" dirty="0">
                 <a:solidFill>
                   <a:srgbClr val="E6EDF2"/>
                 </a:solidFill>
@@ -10163,14 +10163,14 @@
               </a:rPr>
               <a:t>        paddle_x += 3;</a:t>
             </a:r>
-            <a:endParaRPr lang="en-US" sz="1150" dirty="0"/>
+            <a:endParaRPr lang="en-US" sz="1350" dirty="0"/>
           </a:p>
           <a:p>
             <a:pPr indent="0" marL="0">
               <a:buNone/>
             </a:pPr>
             <a:r>
-              <a:rPr lang="en-US" sz="1150" dirty="0">
+              <a:rPr lang="en-US" sz="1350" dirty="0">
                 <a:solidFill>
                   <a:srgbClr val="E6EDF2"/>
                 </a:solidFill>
@@ -10180,14 +10180,14 @@
               </a:rPr>
               <a:t>    }</a:t>
             </a:r>
-            <a:endParaRPr lang="en-US" sz="1150" dirty="0"/>
+            <a:endParaRPr lang="en-US" sz="1350" dirty="0"/>
           </a:p>
           <a:p>
             <a:pPr indent="0" marL="0">
               <a:buNone/>
             </a:pPr>
             <a:r>
-              <a:rPr lang="en-US" sz="1150" dirty="0">
+              <a:rPr lang="en-US" sz="1350" dirty="0">
                 <a:solidFill>
                   <a:srgbClr val="E6EDF2"/>
                 </a:solidFill>
@@ -10197,14 +10197,14 @@
               </a:rPr>
               <a:t>    if (paddle_x &lt; 0)   { paddle_x = 0; }</a:t>
             </a:r>
-            <a:endParaRPr lang="en-US" sz="1150" dirty="0"/>
+            <a:endParaRPr lang="en-US" sz="1350" dirty="0"/>
           </a:p>
           <a:p>
             <a:pPr indent="0" marL="0">
               <a:buNone/>
             </a:pPr>
             <a:r>
-              <a:rPr lang="en-US" sz="1150" dirty="0">
+              <a:rPr lang="en-US" sz="1350" dirty="0">
                 <a:solidFill>
                   <a:srgbClr val="E6EDF2"/>
                 </a:solidFill>
@@ -10218,7 +10218,7 @@
               <a:buNone/>
             </a:pPr>
             <a:r>
-              <a:rPr lang="en-US" sz="1150" dirty="0">
+              <a:rPr lang="en-US" sz="1350" dirty="0">
                 <a:solidFill>
                   <a:srgbClr val="8FB3A0"/>
                 </a:solidFill>
@@ -10226,16 +10226,16 @@
                 <a:ea typeface="Courier New" pitchFamily="34" charset="-122"/>
                 <a:cs typeface="Courier New" pitchFamily="34" charset="-120"/>
               </a:rPr>
-              <a:t>/* 320 - 64-wide paddle */</a:t>
-            </a:r>
-            <a:endParaRPr lang="en-US" sz="1150" dirty="0"/>
+              <a:t>/* 320 - 64-wide</a:t>
+            </a:r>
+            <a:endParaRPr lang="en-US" sz="1350" dirty="0"/>
           </a:p>
           <a:p>
             <a:pPr indent="0" marL="0">
               <a:buNone/>
             </a:pPr>
             <a:r>
-              <a:rPr lang="en-US" sz="1150" dirty="0">
+              <a:rPr lang="en-US" sz="1350" dirty="0">
                 <a:solidFill>
                   <a:srgbClr val="E6EDF2"/>
                 </a:solidFill>
@@ -10243,9 +10243,26 @@
                 <a:ea typeface="Courier New" pitchFamily="34" charset="-122"/>
                 <a:cs typeface="Courier New" pitchFamily="34" charset="-120"/>
               </a:rPr>
+              <a:t>        paddle */</a:t>
+            </a:r>
+            <a:endParaRPr lang="en-US" sz="1350" dirty="0"/>
+          </a:p>
+          <a:p>
+            <a:pPr indent="0" marL="0">
+              <a:buNone/>
+            </a:pPr>
+            <a:r>
+              <a:rPr lang="en-US" sz="1350" dirty="0">
+                <a:solidFill>
+                  <a:srgbClr val="E6EDF2"/>
+                </a:solidFill>
+                <a:latin typeface="Courier New" pitchFamily="34" charset="0"/>
+                <a:ea typeface="Courier New" pitchFamily="34" charset="-122"/>
+                <a:cs typeface="Courier New" pitchFamily="34" charset="-120"/>
+              </a:rPr>
               <a:t>}</a:t>
             </a:r>
-            <a:endParaRPr lang="en-US" sz="1150" dirty="0"/>
+            <a:endParaRPr lang="en-US" sz="1350" dirty="0"/>
           </a:p>
         </p:txBody>
       </p:sp>
@@ -16589,7 +16606,7 @@
               <a:buNone/>
             </a:pPr>
             <a:r>
-              <a:rPr lang="en-US" sz="1100" dirty="0">
+              <a:rPr lang="en-US" sz="1400" dirty="0">
                 <a:solidFill>
                   <a:srgbClr val="E6EDF2"/>
                 </a:solidFill>
@@ -16599,14 +16616,14 @@
               </a:rPr>
               <a:t>void pong_c_draw(void) {</a:t>
             </a:r>
-            <a:endParaRPr lang="en-US" sz="1100" dirty="0"/>
+            <a:endParaRPr lang="en-US" sz="1400" dirty="0"/>
           </a:p>
           <a:p>
             <a:pPr indent="0" marL="0">
               <a:buNone/>
             </a:pPr>
             <a:r>
-              <a:rPr lang="en-US" sz="1100" dirty="0">
+              <a:rPr lang="en-US" sz="1400" dirty="0">
                 <a:solidFill>
                   <a:srgbClr val="E6EDF2"/>
                 </a:solidFill>
@@ -16616,14 +16633,14 @@
               </a:rPr>
               <a:t>    prg32_gfx_clear(PRG32_COLOR_BLACK);</a:t>
             </a:r>
-            <a:endParaRPr lang="en-US" sz="1100" dirty="0"/>
+            <a:endParaRPr lang="en-US" sz="1400" dirty="0"/>
           </a:p>
           <a:p>
             <a:pPr indent="0" marL="0">
               <a:buNone/>
             </a:pPr>
             <a:r>
-              <a:rPr lang="en-US" sz="1100" dirty="0">
+              <a:rPr lang="en-US" sz="1400" dirty="0">
                 <a:solidFill>
                   <a:srgbClr val="E6EDF2"/>
                 </a:solidFill>
@@ -16633,14 +16650,14 @@
               </a:rPr>
               <a:t>    prg32_gfx_rect(paddle_x, 188, 64, 8, PRG32_COLOR_WHITE);</a:t>
             </a:r>
-            <a:endParaRPr lang="en-US" sz="1100" dirty="0"/>
+            <a:endParaRPr lang="en-US" sz="1400" dirty="0"/>
           </a:p>
           <a:p>
             <a:pPr indent="0" marL="0">
               <a:buNone/>
             </a:pPr>
             <a:r>
-              <a:rPr lang="en-US" sz="1100" dirty="0">
+              <a:rPr lang="en-US" sz="1400" dirty="0">
                 <a:solidFill>
                   <a:srgbClr val="E6EDF2"/>
                 </a:solidFill>
@@ -16650,14 +16667,14 @@
               </a:rPr>
               <a:t>    prg32_gfx_rect(ball_x, ball_y, 8, 8, PRG32_COLOR_YELLOW);</a:t>
             </a:r>
-            <a:endParaRPr lang="en-US" sz="1100" dirty="0"/>
+            <a:endParaRPr lang="en-US" sz="1400" dirty="0"/>
           </a:p>
           <a:p>
             <a:pPr indent="0" marL="0">
               <a:buNone/>
             </a:pPr>
             <a:r>
-              <a:rPr lang="en-US" sz="1100" dirty="0">
+              <a:rPr lang="en-US" sz="1400" dirty="0">
                 <a:solidFill>
                   <a:srgbClr val="E6EDF2"/>
                 </a:solidFill>
@@ -16665,16 +16682,16 @@
                 <a:ea typeface="Courier New" pitchFamily="34" charset="-122"/>
                 <a:cs typeface="Courier New" pitchFamily="34" charset="-120"/>
               </a:rPr>
-              <a:t>    prg32_gfx_text8(8, 96, "PONG C", PRG32_COLOR_GREEN, PRG32_COLOR_BLACK);</a:t>
-            </a:r>
-            <a:endParaRPr lang="en-US" sz="1100" dirty="0"/>
+              <a:t>    prg32_gfx_text8(8, 96, "PONG C", PRG32_COLOR_GREEN,</a:t>
+            </a:r>
+            <a:endParaRPr lang="en-US" sz="1400" dirty="0"/>
           </a:p>
           <a:p>
             <a:pPr indent="0" marL="0">
               <a:buNone/>
             </a:pPr>
             <a:r>
-              <a:rPr lang="en-US" sz="1100" dirty="0">
+              <a:rPr lang="en-US" sz="1400" dirty="0">
                 <a:solidFill>
                   <a:srgbClr val="E6EDF2"/>
                 </a:solidFill>
@@ -16682,9 +16699,26 @@
                 <a:ea typeface="Courier New" pitchFamily="34" charset="-122"/>
                 <a:cs typeface="Courier New" pitchFamily="34" charset="-120"/>
               </a:rPr>
+              <a:t>        PRG32_COLOR_BLACK);</a:t>
+            </a:r>
+            <a:endParaRPr lang="en-US" sz="1400" dirty="0"/>
+          </a:p>
+          <a:p>
+            <a:pPr indent="0" marL="0">
+              <a:buNone/>
+            </a:pPr>
+            <a:r>
+              <a:rPr lang="en-US" sz="1400" dirty="0">
+                <a:solidFill>
+                  <a:srgbClr val="E6EDF2"/>
+                </a:solidFill>
+                <a:latin typeface="Courier New" pitchFamily="34" charset="0"/>
+                <a:ea typeface="Courier New" pitchFamily="34" charset="-122"/>
+                <a:cs typeface="Courier New" pitchFamily="34" charset="-120"/>
+              </a:rPr>
               <a:t>}</a:t>
             </a:r>
-            <a:endParaRPr lang="en-US" sz="1100" dirty="0"/>
+            <a:endParaRPr lang="en-US" sz="1400" dirty="0"/>
           </a:p>
         </p:txBody>
       </p:sp>
